--- a/OrangeEnglish_Lesson5_WritingPractice.pptx
+++ b/OrangeEnglish_Lesson5_WritingPractice.pptx
@@ -2607,7 +2607,7 @@
                 <a:ea typeface="Inter" pitchFamily="34" charset="-122"/>
                 <a:cs typeface="Inter" pitchFamily="34" charset="-120"/>
               </a:rPr>
-              <a:t>Lesson 5 of 6 · IELTS Writing Task 1 · orangeenglish.nl</a:t>
+              <a:t>Lesson 5 of 8 · IELTS Writing Task 1 · orangeenglish.nl</a:t>
             </a:r>
             <a:endParaRPr lang="en-US" sz="1800" dirty="0"/>
           </a:p>
@@ -3621,7 +3621,7 @@
                 <a:ea typeface="Inter" pitchFamily="34" charset="-122"/>
                 <a:cs typeface="Inter" pitchFamily="34" charset="-120"/>
               </a:rPr>
-              <a:t>Lesson 5 of 6 · IELTS Writing Task 1 · orangeenglish.nl</a:t>
+              <a:t>Lesson 5 of 8 · IELTS Writing Task 1 · orangeenglish.nl</a:t>
             </a:r>
             <a:endParaRPr lang="en-US" sz="1800" dirty="0"/>
           </a:p>
@@ -4499,7 +4499,7 @@
                 <a:ea typeface="Inter" pitchFamily="34" charset="-122"/>
                 <a:cs typeface="Inter" pitchFamily="34" charset="-120"/>
               </a:rPr>
-              <a:t>Lesson 5 of 6 · IELTS Writing Task 1 · orangeenglish.nl</a:t>
+              <a:t>Lesson 5 of 8 · IELTS Writing Task 1 · orangeenglish.nl</a:t>
             </a:r>
             <a:endParaRPr lang="en-US" sz="1800" dirty="0"/>
           </a:p>
@@ -5589,7 +5589,7 @@
                 <a:ea typeface="Inter" pitchFamily="34" charset="-122"/>
                 <a:cs typeface="Inter" pitchFamily="34" charset="-120"/>
               </a:rPr>
-              <a:t>Lesson 5 of 6 · IELTS Writing Task 1 · orangeenglish.nl</a:t>
+              <a:t>Lesson 5 of 8 · IELTS Writing Task 1 · orangeenglish.nl</a:t>
             </a:r>
             <a:endParaRPr lang="en-US" sz="1800" dirty="0"/>
           </a:p>
@@ -6708,7 +6708,7 @@
                 <a:ea typeface="Inter" pitchFamily="34" charset="-122"/>
                 <a:cs typeface="Inter" pitchFamily="34" charset="-120"/>
               </a:rPr>
-              <a:t>Lesson 5 of 6 · IELTS Writing Task 1 · orangeenglish.nl</a:t>
+              <a:t>Lesson 5 of 8 · IELTS Writing Task 1 · orangeenglish.nl</a:t>
             </a:r>
             <a:endParaRPr lang="en-US" sz="1800" dirty="0"/>
           </a:p>
@@ -7565,7 +7565,7 @@
                 <a:ea typeface="Inter" pitchFamily="34" charset="-122"/>
                 <a:cs typeface="Inter" pitchFamily="34" charset="-120"/>
               </a:rPr>
-              <a:t>Lesson 5 of 6 · IELTS Writing Task 1 · orangeenglish.nl</a:t>
+              <a:t>Lesson 5 of 8 · IELTS Writing Task 1 · orangeenglish.nl</a:t>
             </a:r>
             <a:endParaRPr lang="en-US" sz="1800" dirty="0"/>
           </a:p>
@@ -8148,7 +8148,7 @@
                 <a:ea typeface="Inter" pitchFamily="34" charset="-122"/>
                 <a:cs typeface="Inter" pitchFamily="34" charset="-120"/>
               </a:rPr>
-              <a:t>Lesson 5 of 6 · IELTS Writing Task 1 · orangeenglish.nl</a:t>
+              <a:t>Lesson 5 of 8 · IELTS Writing Task 1 · orangeenglish.nl</a:t>
             </a:r>
             <a:endParaRPr lang="en-US" sz="1800" dirty="0"/>
           </a:p>
@@ -8847,7 +8847,7 @@
                 <a:ea typeface="Inter" pitchFamily="34" charset="-122"/>
                 <a:cs typeface="Inter" pitchFamily="34" charset="-120"/>
               </a:rPr>
-              <a:t>Lesson 5 of 6 · IELTS Writing Task 1 · orangeenglish.nl</a:t>
+              <a:t>Lesson 5 of 8 · IELTS Writing Task 1 · orangeenglish.nl</a:t>
             </a:r>
             <a:endParaRPr lang="en-US" sz="1800" dirty="0"/>
           </a:p>

--- a/OrangeEnglish_Lesson5_WritingPractice.pptx
+++ b/OrangeEnglish_Lesson5_WritingPractice.pptx
@@ -1599,6 +1599,10 @@
           </a:solidFill>
           <a:ln/>
         </p:spPr>
+        <p:txBody>
+          <a:bodyPr/>
+          <a:p/>
+        </p:txBody>
       </p:sp>
       <p:pic>
         <p:nvPicPr>
@@ -1968,6 +1972,10 @@
           </a:solidFill>
           <a:ln/>
         </p:spPr>
+        <p:txBody>
+          <a:bodyPr/>
+          <a:p/>
+        </p:txBody>
       </p:sp>
       <p:pic>
         <p:nvPicPr>
@@ -2607,7 +2615,7 @@
                 <a:ea typeface="Inter" pitchFamily="34" charset="-122"/>
                 <a:cs typeface="Inter" pitchFamily="34" charset="-120"/>
               </a:rPr>
-              <a:t>Lesson 5 of 8 · IELTS Writing Task 1 · orangeenglish.nl</a:t>
+              <a:t>Lesson 5 of 6 · IELTS Writing Task 1 · orangeenglish.nl</a:t>
             </a:r>
             <a:endParaRPr lang="en-US" sz="1800" dirty="0"/>
           </a:p>
@@ -2698,6 +2706,10 @@
           </a:solidFill>
           <a:ln/>
         </p:spPr>
+        <p:txBody>
+          <a:bodyPr/>
+          <a:p/>
+        </p:txBody>
       </p:sp>
       <p:pic>
         <p:nvPicPr>
@@ -2939,6 +2951,10 @@
             <a:prstDash val="solid"/>
           </a:ln>
         </p:spPr>
+        <p:txBody>
+          <a:bodyPr/>
+          <a:p/>
+        </p:txBody>
       </p:sp>
       <p:sp>
         <p:nvSpPr>
@@ -2959,6 +2975,10 @@
           </a:solidFill>
           <a:ln/>
         </p:spPr>
+        <p:txBody>
+          <a:bodyPr/>
+          <a:p/>
+        </p:txBody>
       </p:sp>
       <p:sp>
         <p:nvSpPr>
@@ -3098,6 +3118,10 @@
             <a:prstDash val="solid"/>
           </a:ln>
         </p:spPr>
+        <p:txBody>
+          <a:bodyPr/>
+          <a:p/>
+        </p:txBody>
       </p:sp>
       <p:sp>
         <p:nvSpPr>
@@ -3118,6 +3142,10 @@
           </a:solidFill>
           <a:ln/>
         </p:spPr>
+        <p:txBody>
+          <a:bodyPr/>
+          <a:p/>
+        </p:txBody>
       </p:sp>
       <p:sp>
         <p:nvSpPr>
@@ -3257,6 +3285,10 @@
             <a:prstDash val="solid"/>
           </a:ln>
         </p:spPr>
+        <p:txBody>
+          <a:bodyPr/>
+          <a:p/>
+        </p:txBody>
       </p:sp>
       <p:sp>
         <p:nvSpPr>
@@ -3277,6 +3309,10 @@
           </a:solidFill>
           <a:ln/>
         </p:spPr>
+        <p:txBody>
+          <a:bodyPr/>
+          <a:p/>
+        </p:txBody>
       </p:sp>
       <p:sp>
         <p:nvSpPr>
@@ -3457,6 +3493,10 @@
             <a:prstDash val="solid"/>
           </a:ln>
         </p:spPr>
+        <p:txBody>
+          <a:bodyPr/>
+          <a:p/>
+        </p:txBody>
       </p:sp>
       <p:sp>
         <p:nvSpPr>
@@ -3477,6 +3517,10 @@
           </a:solidFill>
           <a:ln/>
         </p:spPr>
+        <p:txBody>
+          <a:bodyPr/>
+          <a:p/>
+        </p:txBody>
       </p:sp>
       <p:sp>
         <p:nvSpPr>
@@ -3621,7 +3665,7 @@
                 <a:ea typeface="Inter" pitchFamily="34" charset="-122"/>
                 <a:cs typeface="Inter" pitchFamily="34" charset="-120"/>
               </a:rPr>
-              <a:t>Lesson 5 of 8 · IELTS Writing Task 1 · orangeenglish.nl</a:t>
+              <a:t>Lesson 5 of 6 · IELTS Writing Task 1 · orangeenglish.nl</a:t>
             </a:r>
             <a:endParaRPr lang="en-US" sz="1800" dirty="0"/>
           </a:p>
@@ -3712,6 +3756,10 @@
           </a:solidFill>
           <a:ln/>
         </p:spPr>
+        <p:txBody>
+          <a:bodyPr/>
+          <a:p/>
+        </p:txBody>
       </p:sp>
       <p:pic>
         <p:nvPicPr>
@@ -3875,6 +3923,10 @@
             <a:prstDash val="solid"/>
           </a:ln>
         </p:spPr>
+        <p:txBody>
+          <a:bodyPr/>
+          <a:p/>
+        </p:txBody>
       </p:sp>
       <p:sp>
         <p:nvSpPr>
@@ -4108,6 +4160,10 @@
             <a:prstDash val="solid"/>
           </a:ln>
         </p:spPr>
+        <p:txBody>
+          <a:bodyPr/>
+          <a:p/>
+        </p:txBody>
       </p:sp>
       <p:sp>
         <p:nvSpPr>
@@ -4341,6 +4397,10 @@
             <a:prstDash val="solid"/>
           </a:ln>
         </p:spPr>
+        <p:txBody>
+          <a:bodyPr/>
+          <a:p/>
+        </p:txBody>
       </p:sp>
       <p:sp>
         <p:nvSpPr>
@@ -4499,7 +4559,7 @@
                 <a:ea typeface="Inter" pitchFamily="34" charset="-122"/>
                 <a:cs typeface="Inter" pitchFamily="34" charset="-120"/>
               </a:rPr>
-              <a:t>Lesson 5 of 8 · IELTS Writing Task 1 · orangeenglish.nl</a:t>
+              <a:t>Lesson 5 of 6 · IELTS Writing Task 1 · orangeenglish.nl</a:t>
             </a:r>
             <a:endParaRPr lang="en-US" sz="1800" dirty="0"/>
           </a:p>
@@ -4590,6 +4650,10 @@
           </a:solidFill>
           <a:ln/>
         </p:spPr>
+        <p:txBody>
+          <a:bodyPr/>
+          <a:p/>
+        </p:txBody>
       </p:sp>
       <p:pic>
         <p:nvPicPr>
@@ -4717,7 +4781,7 @@
                 <a:ea typeface="Montserrat" pitchFamily="34" charset="-122"/>
                 <a:cs typeface="Montserrat" pitchFamily="34" charset="-120"/>
               </a:rPr>
-              <a:t>One graph, one complete response.</a:t>
+              <a:t>A shortened example showing the structure.</a:t>
             </a:r>
             <a:endParaRPr lang="en-US" sz="3600" dirty="0"/>
           </a:p>
@@ -5182,7 +5246,7 @@
                 <a:ea typeface="Inter" pitchFamily="34" charset="-122"/>
                 <a:cs typeface="Inter" pitchFamily="34" charset="-120"/>
               </a:rPr>
-              <a:t>"The British Museum began at around 2 million in 1990 and </a:t>
+              <a:t>"Visitor numbers at the British Museum stood at 2 million in 1990 and </a:t>
             </a:r>
             <a:pPr algn="l" indent="0" marL="0">
               <a:lnSpc>
@@ -5216,7 +5280,7 @@
                 <a:ea typeface="Inter" pitchFamily="34" charset="-122"/>
                 <a:cs typeface="Inter" pitchFamily="34" charset="-120"/>
               </a:rPr>
-              <a:t>to roughly 6 million by 2020, remaining the most popular throughout."</a:t>
+              <a:t>to 6 million by 2020. It was the most popular museum throughout."</a:t>
             </a:r>
             <a:endParaRPr lang="en-US" sz="1875" dirty="0"/>
           </a:p>
@@ -5405,7 +5469,7 @@
                 <a:ea typeface="Inter" pitchFamily="34" charset="-122"/>
                 <a:cs typeface="Inter" pitchFamily="34" charset="-120"/>
               </a:rPr>
-              <a:t>the other two began under 1 million. While the Tate grew gradually to 3 million, the Science Museum fluctuated before reaching 2.5 million."</a:t>
+              <a:t>attendance at the other two began under 1 million. While the Tate's figure grew gradually to 3 million, the Science Museum's fluctuated before reaching 2.5 million."</a:t>
             </a:r>
             <a:endParaRPr lang="en-US" sz="1875" dirty="0"/>
           </a:p>
@@ -5434,6 +5498,10 @@
           </a:solidFill>
           <a:ln/>
         </p:spPr>
+        <p:txBody>
+          <a:bodyPr/>
+          <a:p/>
+        </p:txBody>
       </p:sp>
       <p:sp>
         <p:nvSpPr>
@@ -5548,7 +5616,7 @@
                 <a:ea typeface="Inter" pitchFamily="34" charset="-122"/>
                 <a:cs typeface="Inter" pitchFamily="34" charset="-120"/>
               </a:rPr>
-              <a:t>from Lessons 2–3, varied verbs, past simple, comparatives, linking words.</a:t>
+              <a:t>from Lessons 2–3: precise verbs, the past simple, comparisons of equivalent figures and clear connections.</a:t>
             </a:r>
             <a:endParaRPr lang="en-US" sz="1800" dirty="0"/>
           </a:p>
@@ -5589,7 +5657,7 @@
                 <a:ea typeface="Inter" pitchFamily="34" charset="-122"/>
                 <a:cs typeface="Inter" pitchFamily="34" charset="-120"/>
               </a:rPr>
-              <a:t>Lesson 5 of 8 · IELTS Writing Task 1 · orangeenglish.nl</a:t>
+              <a:t>Lesson 5 of 6 · IELTS Writing Task 1 · orangeenglish.nl</a:t>
             </a:r>
             <a:endParaRPr lang="en-US" sz="1800" dirty="0"/>
           </a:p>
@@ -5680,6 +5748,10 @@
           </a:solidFill>
           <a:ln/>
         </p:spPr>
+        <p:txBody>
+          <a:bodyPr/>
+          <a:p/>
+        </p:txBody>
       </p:sp>
       <p:pic>
         <p:nvPicPr>
@@ -5843,6 +5915,10 @@
             <a:prstDash val="solid"/>
           </a:ln>
         </p:spPr>
+        <p:txBody>
+          <a:bodyPr/>
+          <a:p/>
+        </p:txBody>
       </p:sp>
       <p:sp>
         <p:nvSpPr>
@@ -5865,6 +5941,10 @@
           </a:solidFill>
           <a:ln/>
         </p:spPr>
+        <p:txBody>
+          <a:bodyPr/>
+          <a:p/>
+        </p:txBody>
       </p:sp>
       <p:sp>
         <p:nvSpPr>
@@ -5945,7 +6025,7 @@
                 <a:ea typeface="Inter" pitchFamily="34" charset="-122"/>
                 <a:cs typeface="Inter" pitchFamily="34" charset="-120"/>
               </a:rPr>
-              <a:t>Is the tense consistent, </a:t>
+              <a:t>Does the tense </a:t>
             </a:r>
             <a:pPr algn="l" indent="0" marL="0">
               <a:lnSpc>
@@ -5962,7 +6042,7 @@
                 <a:ea typeface="Inter" pitchFamily="34" charset="-122"/>
                 <a:cs typeface="Inter" pitchFamily="34" charset="-120"/>
               </a:rPr>
-              <a:t>past simple throughout</a:t>
+              <a:t>match the time reference</a:t>
             </a:r>
             <a:pPr algn="l" indent="0" marL="0">
               <a:lnSpc>
@@ -6015,6 +6095,10 @@
             <a:prstDash val="solid"/>
           </a:ln>
         </p:spPr>
+        <p:txBody>
+          <a:bodyPr/>
+          <a:p/>
+        </p:txBody>
       </p:sp>
       <p:sp>
         <p:nvSpPr>
@@ -6037,6 +6121,10 @@
           </a:solidFill>
           <a:ln/>
         </p:spPr>
+        <p:txBody>
+          <a:bodyPr/>
+          <a:p/>
+        </p:txBody>
       </p:sp>
       <p:sp>
         <p:nvSpPr>
@@ -6134,7 +6222,7 @@
                 <a:ea typeface="Inter" pitchFamily="34" charset="-122"/>
                 <a:cs typeface="Inter" pitchFamily="34" charset="-120"/>
               </a:rPr>
-              <a:t>free of numbers</a:t>
+              <a:t>a clear summary</a:t>
             </a:r>
             <a:pPr algn="l" indent="0" marL="0">
               <a:lnSpc>
@@ -6187,6 +6275,10 @@
             <a:prstDash val="solid"/>
           </a:ln>
         </p:spPr>
+        <p:txBody>
+          <a:bodyPr/>
+          <a:p/>
+        </p:txBody>
       </p:sp>
       <p:sp>
         <p:nvSpPr>
@@ -6209,6 +6301,10 @@
           </a:solidFill>
           <a:ln/>
         </p:spPr>
+        <p:txBody>
+          <a:bodyPr/>
+          <a:p/>
+        </p:txBody>
       </p:sp>
       <p:sp>
         <p:nvSpPr>
@@ -6359,6 +6455,10 @@
             <a:prstDash val="solid"/>
           </a:ln>
         </p:spPr>
+        <p:txBody>
+          <a:bodyPr/>
+          <a:p/>
+        </p:txBody>
       </p:sp>
       <p:sp>
         <p:nvSpPr>
@@ -6381,6 +6481,10 @@
           </a:solidFill>
           <a:ln/>
         </p:spPr>
+        <p:txBody>
+          <a:bodyPr/>
+          <a:p/>
+        </p:txBody>
       </p:sp>
       <p:sp>
         <p:nvSpPr>
@@ -6461,7 +6565,7 @@
                 <a:ea typeface="Inter" pitchFamily="34" charset="-122"/>
                 <a:cs typeface="Inter" pitchFamily="34" charset="-120"/>
               </a:rPr>
-              <a:t>Is vocabulary </a:t>
+              <a:t>Are comparisons </a:t>
             </a:r>
             <a:pPr algn="l" indent="0" marL="0">
               <a:lnSpc>
@@ -6478,7 +6582,7 @@
                 <a:ea typeface="Inter" pitchFamily="34" charset="-122"/>
                 <a:cs typeface="Inter" pitchFamily="34" charset="-120"/>
               </a:rPr>
-              <a:t>varied</a:t>
+              <a:t>like with like</a:t>
             </a:r>
             <a:pPr algn="l" indent="0" marL="0">
               <a:lnSpc>
@@ -6495,7 +6599,7 @@
                 <a:ea typeface="Inter" pitchFamily="34" charset="-122"/>
                 <a:cs typeface="Inter" pitchFamily="34" charset="-120"/>
               </a:rPr>
-              <a:t>, no repeated verbs?</a:t>
+              <a:t>?</a:t>
             </a:r>
             <a:endParaRPr lang="en-US" sz="2325" dirty="0"/>
           </a:p>
@@ -6531,6 +6635,10 @@
             <a:prstDash val="solid"/>
           </a:ln>
         </p:spPr>
+        <p:txBody>
+          <a:bodyPr/>
+          <a:p/>
+        </p:txBody>
       </p:sp>
       <p:sp>
         <p:nvSpPr>
@@ -6553,6 +6661,10 @@
           </a:solidFill>
           <a:ln/>
         </p:spPr>
+        <p:txBody>
+          <a:bodyPr/>
+          <a:p/>
+        </p:txBody>
       </p:sp>
       <p:sp>
         <p:nvSpPr>
@@ -6633,7 +6745,7 @@
                 <a:ea typeface="Inter" pitchFamily="34" charset="-122"/>
                 <a:cs typeface="Inter" pitchFamily="34" charset="-120"/>
               </a:rPr>
-              <a:t>Are </a:t>
+              <a:t>Do the </a:t>
             </a:r>
             <a:pPr algn="l" indent="0" marL="0">
               <a:lnSpc>
@@ -6650,7 +6762,7 @@
                 <a:ea typeface="Inter" pitchFamily="34" charset="-122"/>
                 <a:cs typeface="Inter" pitchFamily="34" charset="-120"/>
               </a:rPr>
-              <a:t>at least two linking words </a:t>
+              <a:t>connections between sentences </a:t>
             </a:r>
             <a:pPr algn="l" indent="0" marL="0">
               <a:lnSpc>
@@ -6667,7 +6779,7 @@
                 <a:ea typeface="Inter" pitchFamily="34" charset="-122"/>
                 <a:cs typeface="Inter" pitchFamily="34" charset="-120"/>
               </a:rPr>
-              <a:t>used (while, in contrast, however)?</a:t>
+              <a:t>make sense?</a:t>
             </a:r>
             <a:endParaRPr lang="en-US" sz="2325" dirty="0"/>
           </a:p>
@@ -6708,7 +6820,7 @@
                 <a:ea typeface="Inter" pitchFamily="34" charset="-122"/>
                 <a:cs typeface="Inter" pitchFamily="34" charset="-120"/>
               </a:rPr>
-              <a:t>Lesson 5 of 8 · IELTS Writing Task 1 · orangeenglish.nl</a:t>
+              <a:t>Lesson 5 of 6 · IELTS Writing Task 1 · orangeenglish.nl</a:t>
             </a:r>
             <a:endParaRPr lang="en-US" sz="1800" dirty="0"/>
           </a:p>
@@ -6799,6 +6911,10 @@
           </a:solidFill>
           <a:ln/>
         </p:spPr>
+        <p:txBody>
+          <a:bodyPr/>
+          <a:p/>
+        </p:txBody>
       </p:sp>
       <p:pic>
         <p:nvPicPr>
@@ -6962,6 +7078,10 @@
             <a:prstDash val="solid"/>
           </a:ln>
         </p:spPr>
+        <p:txBody>
+          <a:bodyPr/>
+          <a:p/>
+        </p:txBody>
       </p:sp>
       <p:sp>
         <p:nvSpPr>
@@ -7124,7 +7244,7 @@
                 <a:ea typeface="Caveat" pitchFamily="34" charset="-122"/>
                 <a:cs typeface="Caveat" pitchFamily="34" charset="-120"/>
               </a:rPr>
-              <a:t>listed numbers, repeated "increased," no comparison or linking</a:t>
+              <a:t>listed numbers, repeated "increased," no comparison between the museums</a:t>
             </a:r>
             <a:endParaRPr lang="en-US" sz="2250" dirty="0"/>
           </a:p>
@@ -7160,6 +7280,10 @@
             <a:prstDash val="solid"/>
           </a:ln>
         </p:spPr>
+        <p:txBody>
+          <a:bodyPr/>
+          <a:p/>
+        </p:txBody>
       </p:sp>
       <p:sp>
         <p:nvSpPr>
@@ -7245,14 +7369,14 @@
       </p:sp>
       <p:sp>
         <p:nvSpPr>
-          <p:cNvPr id="15" name="Text 11"/>
+          <p:cNvPr id="20" name="Text 15"/>
           <p:cNvSpPr/>
           <p:nvPr/>
         </p:nvSpPr>
         <p:spPr>
           <a:xfrm>
             <a:off x="1666875" y="6163270"/>
-            <a:ext cx="3249044" cy="419100"/>
+            <a:ext cx="14495920" cy="874812"/>
           </a:xfrm>
           <a:prstGeom prst="rect">
             <a:avLst/>
@@ -7281,69 +7405,11 @@
                 <a:ea typeface="Inter" pitchFamily="34" charset="-122"/>
                 <a:cs typeface="Inter" pitchFamily="34" charset="-120"/>
               </a:rPr>
-              <a:t>"The British Museum</a:t>
+              <a:t>"Visitor numbers at the British Museum </a:t>
             </a:r>
             <a:endParaRPr lang="en-US" sz="2475" dirty="0"/>
-          </a:p>
-        </p:txBody>
-      </p:sp>
-      <p:pic>
-        <p:nvPicPr>
-          <p:cNvPr id="16" name="Image 2" descr="preencoded.png">    </p:cNvPr>
-          <p:cNvPicPr>
-            <a:picLocks noChangeAspect="1"/>
-          </p:cNvPicPr>
-          <p:nvPr/>
-        </p:nvPicPr>
-        <p:blipFill>
-          <a:blip r:embed="rId3">
-            <a:alphaModFix amt="95000"/>
-          </a:blip>
-          <a:stretch>
-            <a:fillRect/>
-          </a:stretch>
-        </p:blipFill>
-        <p:spPr>
-          <a:xfrm>
-            <a:off x="4828803" y="6129933"/>
-            <a:ext cx="3094509" cy="474762"/>
-          </a:xfrm>
-          <a:prstGeom prst="rect">
-            <a:avLst/>
-          </a:prstGeom>
-        </p:spPr>
-      </p:pic>
-      <p:sp>
-        <p:nvSpPr>
-          <p:cNvPr id="17" name="Text 12"/>
-          <p:cNvSpPr/>
-          <p:nvPr/>
-        </p:nvSpPr>
-        <p:spPr>
-          <a:xfrm>
-            <a:off x="4905003" y="6163270"/>
-            <a:ext cx="3236320" cy="419100"/>
-          </a:xfrm>
-          <a:prstGeom prst="rect">
-            <a:avLst/>
-          </a:prstGeom>
-          <a:noFill/>
-          <a:ln/>
-        </p:spPr>
-        <p:txBody>
-          <a:bodyPr wrap="none" lIns="25400" tIns="25400" rIns="25400" bIns="25400" rtlCol="0" anchor="t">
-            <a:normAutofit/>
-          </a:bodyPr>
-          <a:lstStyle/>
-          <a:p>
-            <a:pPr algn="l" indent="0" marL="0">
-              <a:lnSpc>
-                <a:spcPct val="145000"/>
-              </a:lnSpc>
-              <a:buNone/>
-            </a:pPr>
-            <a:r>
-              <a:rPr lang="en-US" sz="2475" b="1" dirty="0">
+            <a:r>
+              <a:rPr lang="en-US" sz="2475" dirty="0" b="1">
                 <a:solidFill>
                   <a:srgbClr val="292929"/>
                 </a:solidFill>
@@ -7353,39 +7419,6 @@
               </a:rPr>
               <a:t>climbed to 6 million</a:t>
             </a:r>
-            <a:endParaRPr lang="en-US" sz="2475" dirty="0"/>
-          </a:p>
-        </p:txBody>
-      </p:sp>
-      <p:sp>
-        <p:nvSpPr>
-          <p:cNvPr id="18" name="Text 13"/>
-          <p:cNvSpPr/>
-          <p:nvPr/>
-        </p:nvSpPr>
-        <p:spPr>
-          <a:xfrm>
-            <a:off x="7847112" y="6163270"/>
-            <a:ext cx="3882451" cy="419100"/>
-          </a:xfrm>
-          <a:prstGeom prst="rect">
-            <a:avLst/>
-          </a:prstGeom>
-          <a:noFill/>
-          <a:ln/>
-        </p:spPr>
-        <p:txBody>
-          <a:bodyPr wrap="square" lIns="0" tIns="0" rIns="0" bIns="0" rtlCol="0" anchor="t">
-            <a:normAutofit/>
-          </a:bodyPr>
-          <a:lstStyle/>
-          <a:p>
-            <a:pPr algn="l" indent="0" marL="0">
-              <a:lnSpc>
-                <a:spcPct val="145000"/>
-              </a:lnSpc>
-              <a:buNone/>
-            </a:pPr>
             <a:r>
               <a:rPr lang="en-US" sz="2475" dirty="0">
                 <a:solidFill>
@@ -7395,43 +7428,10 @@
                 <a:ea typeface="Inter" pitchFamily="34" charset="-122"/>
                 <a:cs typeface="Inter" pitchFamily="34" charset="-120"/>
               </a:rPr>
-              <a:t>, far higher than the Tate,</a:t>
-            </a:r>
-            <a:endParaRPr lang="en-US" sz="2475" dirty="0"/>
-          </a:p>
-        </p:txBody>
-      </p:sp>
-      <p:sp>
-        <p:nvSpPr>
-          <p:cNvPr id="19" name="Text 14"/>
-          <p:cNvSpPr/>
-          <p:nvPr/>
-        </p:nvSpPr>
-        <p:spPr>
-          <a:xfrm>
-            <a:off x="11700272" y="6163270"/>
-            <a:ext cx="882848" cy="419100"/>
-          </a:xfrm>
-          <a:prstGeom prst="rect">
-            <a:avLst/>
-          </a:prstGeom>
-          <a:noFill/>
-          <a:ln/>
-        </p:spPr>
-        <p:txBody>
-          <a:bodyPr wrap="square" lIns="25400" tIns="25400" rIns="25400" bIns="25400" rtlCol="0" anchor="t">
-            <a:normAutofit/>
-          </a:bodyPr>
-          <a:lstStyle/>
-          <a:p>
-            <a:pPr algn="l" indent="0" marL="0">
-              <a:lnSpc>
-                <a:spcPct val="145000"/>
-              </a:lnSpc>
-              <a:buNone/>
-            </a:pPr>
-            <a:r>
-              <a:rPr lang="en-US" sz="2475" b="1" dirty="0">
+              <a:t>, twice the Tate's figure, </a:t>
+            </a:r>
+            <a:r>
+              <a:rPr lang="en-US" sz="2475" dirty="0" b="1">
                 <a:solidFill>
                   <a:srgbClr val="292929"/>
                 </a:solidFill>
@@ -7441,39 +7441,6 @@
               </a:rPr>
               <a:t>while</a:t>
             </a:r>
-            <a:endParaRPr lang="en-US" sz="2475" dirty="0"/>
-          </a:p>
-        </p:txBody>
-      </p:sp>
-      <p:sp>
-        <p:nvSpPr>
-          <p:cNvPr id="20" name="Text 15"/>
-          <p:cNvSpPr/>
-          <p:nvPr/>
-        </p:nvSpPr>
-        <p:spPr>
-          <a:xfrm>
-            <a:off x="1666875" y="6163270"/>
-            <a:ext cx="14495920" cy="874812"/>
-          </a:xfrm>
-          <a:prstGeom prst="rect">
-            <a:avLst/>
-          </a:prstGeom>
-          <a:noFill/>
-          <a:ln/>
-        </p:spPr>
-        <p:txBody>
-          <a:bodyPr wrap="square" lIns="0" tIns="0" rIns="0" bIns="0" rtlCol="0" anchor="t">
-            <a:normAutofit/>
-          </a:bodyPr>
-          <a:lstStyle/>
-          <a:p>
-            <a:pPr algn="l" indent="0" marL="0">
-              <a:lnSpc>
-                <a:spcPct val="145000"/>
-              </a:lnSpc>
-              <a:buNone/>
-            </a:pPr>
             <a:r>
               <a:rPr lang="en-US" sz="2475" dirty="0">
                 <a:solidFill>
@@ -7483,9 +7450,8 @@
                 <a:ea typeface="Inter" pitchFamily="34" charset="-122"/>
                 <a:cs typeface="Inter" pitchFamily="34" charset="-120"/>
               </a:rPr>
-              <a:t>the Science Museum only reached 2.5 million."</a:t>
-            </a:r>
-            <a:endParaRPr lang="en-US" sz="2475" dirty="0"/>
+              <a:t> the Science Museum reached only 2.5 million."</a:t>
+            </a:r>
           </a:p>
         </p:txBody>
       </p:sp>
@@ -7524,7 +7490,7 @@
                 <a:ea typeface="Caveat" pitchFamily="34" charset="-122"/>
                 <a:cs typeface="Caveat" pitchFamily="34" charset="-120"/>
               </a:rPr>
-              <a:t>varied verb + comparative + linking word + clear comparison</a:t>
+              <a:t>precise verb + figures compared with figures + a clear connection</a:t>
             </a:r>
             <a:endParaRPr lang="en-US" sz="2250" dirty="0"/>
           </a:p>
@@ -7565,7 +7531,7 @@
                 <a:ea typeface="Inter" pitchFamily="34" charset="-122"/>
                 <a:cs typeface="Inter" pitchFamily="34" charset="-120"/>
               </a:rPr>
-              <a:t>Lesson 5 of 8 · IELTS Writing Task 1 · orangeenglish.nl</a:t>
+              <a:t>Lesson 5 of 6 · IELTS Writing Task 1 · orangeenglish.nl</a:t>
             </a:r>
             <a:endParaRPr lang="en-US" sz="1800" dirty="0"/>
           </a:p>
@@ -7656,6 +7622,10 @@
           </a:solidFill>
           <a:ln/>
         </p:spPr>
+        <p:txBody>
+          <a:bodyPr/>
+          <a:p/>
+        </p:txBody>
       </p:sp>
       <p:pic>
         <p:nvPicPr>
@@ -7941,6 +7911,10 @@
             <a:prstDash val="solid"/>
           </a:ln>
         </p:spPr>
+        <p:txBody>
+          <a:bodyPr/>
+          <a:p/>
+        </p:txBody>
       </p:sp>
       <p:sp>
         <p:nvSpPr>
@@ -7961,6 +7935,10 @@
           </a:solidFill>
           <a:ln/>
         </p:spPr>
+        <p:txBody>
+          <a:bodyPr/>
+          <a:p/>
+        </p:txBody>
       </p:sp>
       <p:sp>
         <p:nvSpPr>
@@ -8024,6 +8002,10 @@
           </a:solidFill>
           <a:ln/>
         </p:spPr>
+        <p:txBody>
+          <a:bodyPr/>
+          <a:p/>
+        </p:txBody>
       </p:sp>
       <p:sp>
         <p:nvSpPr>
@@ -8046,6 +8028,10 @@
           </a:solidFill>
           <a:ln/>
         </p:spPr>
+        <p:txBody>
+          <a:bodyPr/>
+          <a:p/>
+        </p:txBody>
       </p:sp>
       <p:sp>
         <p:nvSpPr>
@@ -8068,6 +8054,10 @@
           </a:solidFill>
           <a:ln/>
         </p:spPr>
+        <p:txBody>
+          <a:bodyPr/>
+          <a:p/>
+        </p:txBody>
       </p:sp>
       <p:sp>
         <p:nvSpPr>
@@ -8090,6 +8080,10 @@
           </a:solidFill>
           <a:ln/>
         </p:spPr>
+        <p:txBody>
+          <a:bodyPr/>
+          <a:p/>
+        </p:txBody>
       </p:sp>
       <p:sp>
         <p:nvSpPr>
@@ -8112,6 +8106,10 @@
           </a:solidFill>
           <a:ln/>
         </p:spPr>
+        <p:txBody>
+          <a:bodyPr/>
+          <a:p/>
+        </p:txBody>
       </p:sp>
       <p:sp>
         <p:nvSpPr>
@@ -8148,7 +8146,7 @@
                 <a:ea typeface="Inter" pitchFamily="34" charset="-122"/>
                 <a:cs typeface="Inter" pitchFamily="34" charset="-120"/>
               </a:rPr>
-              <a:t>Lesson 5 of 8 · IELTS Writing Task 1 · orangeenglish.nl</a:t>
+              <a:t>Lesson 5 of 6 · IELTS Writing Task 1 · orangeenglish.nl</a:t>
             </a:r>
             <a:endParaRPr lang="en-US" sz="1800" dirty="0"/>
           </a:p>
@@ -8239,6 +8237,10 @@
           </a:solidFill>
           <a:ln/>
         </p:spPr>
+        <p:txBody>
+          <a:bodyPr/>
+          <a:p/>
+        </p:txBody>
       </p:sp>
       <p:pic>
         <p:nvPicPr>
@@ -8391,6 +8393,10 @@
           </a:solidFill>
           <a:ln/>
         </p:spPr>
+        <p:txBody>
+          <a:bodyPr/>
+          <a:p/>
+        </p:txBody>
       </p:sp>
       <p:sp>
         <p:nvSpPr>
@@ -8472,6 +8478,10 @@
           </a:solidFill>
           <a:ln/>
         </p:spPr>
+        <p:txBody>
+          <a:bodyPr/>
+          <a:p/>
+        </p:txBody>
       </p:sp>
       <p:sp>
         <p:nvSpPr>
@@ -8570,6 +8580,10 @@
           </a:solidFill>
           <a:ln/>
         </p:spPr>
+        <p:txBody>
+          <a:bodyPr/>
+          <a:p/>
+        </p:txBody>
       </p:sp>
       <p:sp>
         <p:nvSpPr>
@@ -8668,6 +8682,10 @@
           </a:solidFill>
           <a:ln/>
         </p:spPr>
+        <p:txBody>
+          <a:bodyPr/>
+          <a:p/>
+        </p:txBody>
       </p:sp>
       <p:sp>
         <p:nvSpPr>
@@ -8847,7 +8865,7 @@
                 <a:ea typeface="Inter" pitchFamily="34" charset="-122"/>
                 <a:cs typeface="Inter" pitchFamily="34" charset="-120"/>
               </a:rPr>
-              <a:t>Lesson 5 of 8 · IELTS Writing Task 1 · orangeenglish.nl</a:t>
+              <a:t>Lesson 5 of 6 · IELTS Writing Task 1 · orangeenglish.nl</a:t>
             </a:r>
             <a:endParaRPr lang="en-US" sz="1800" dirty="0"/>
           </a:p>
